--- a/curso/pptx/S06.pptx
+++ b/curso/pptx/S06.pptx
@@ -3819,8 +3819,8 @@
         </p:nvSpPr>
         <p:spPr>
           <a:xfrm>
-            <a:off x="640000" y="420000"/>
-            <a:ext cx="10912000" cy="420000"/>
+            <a:off x="10652000" y="380000"/>
+            <a:ext cx="900000" cy="800000"/>
           </a:xfrm>
           <a:prstGeom prst="rect">
             <a:avLst/>
@@ -3835,17 +3835,17 @@
           <a:p>
             <a:pPr>
               <a:spcAft>
-                <a:spcPts val="810"/>
+                <a:spcPts val="1980"/>
               </a:spcAft>
             </a:pPr>
             <a:r>
-              <a:rPr sz="1800" b="1">
+              <a:rPr sz="4400" b="0">
                 <a:solidFill>
                   <a:srgbClr val="1F2A44"/>
                 </a:solidFill>
                 <a:latin typeface="Nunito Sans"/>
               </a:rPr>
-              <a:t>🦉 Aula de Filosofía</a:t>
+              <a:t>🙃</a:t>
             </a:r>
           </a:p>
         </p:txBody>

--- a/curso/pptx/S06.pptx
+++ b/curso/pptx/S06.pptx
@@ -470,356 +470,6 @@
     </a:lvl9pPr>
   </p:notesStyle>
 </p:notesMaster>
-</file>
-
-<file path=ppt/notesSlides/notesSlide1.xml><?xml version="1.0" encoding="utf-8"?>
-<p:notes xmlns:a="http://schemas.openxmlformats.org/drawingml/2006/main" xmlns:p="http://schemas.openxmlformats.org/presentationml/2006/main" xmlns:r="http://schemas.openxmlformats.org/officeDocument/2006/relationships">
-  <p:cSld>
-    <p:spTree>
-      <p:nvGrpSpPr>
-        <p:cNvPr id="1" name=""/>
-        <p:cNvGrpSpPr/>
-        <p:nvPr/>
-      </p:nvGrpSpPr>
-      <p:grpSpPr>
-        <a:xfrm>
-          <a:off x="0" y="0"/>
-          <a:ext cx="0" cy="0"/>
-          <a:chOff x="0" y="0"/>
-          <a:chExt cx="0" cy="0"/>
-        </a:xfrm>
-      </p:grpSpPr>
-      <p:sp>
-        <p:nvSpPr>
-          <p:cNvPr id="2" name="Slide Image Placeholder 1"/>
-          <p:cNvSpPr>
-            <a:spLocks noGrp="1"/>
-          </p:cNvSpPr>
-          <p:nvPr>
-            <p:ph type="sldImg" idx="2"/>
-          </p:nvPr>
-        </p:nvSpPr>
-        <p:spPr/>
-      </p:sp>
-      <p:sp>
-        <p:nvSpPr>
-          <p:cNvPr id="3" name="Notes Placeholder 2"/>
-          <p:cNvSpPr>
-            <a:spLocks noGrp="1"/>
-          </p:cNvSpPr>
-          <p:nvPr>
-            <p:ph type="body" idx="3" sz="quarter"/>
-          </p:nvPr>
-        </p:nvSpPr>
-        <p:spPr/>
-        <p:txBody>
-          <a:bodyPr/>
-          <a:lstStyle/>
-          <a:p>
-            <a:r>
-              <a:t>3 minutos. Sin apuntes. Es para recordar, no cuenta para nota.</a:t>
-            </a:r>
-          </a:p>
-        </p:txBody>
-      </p:sp>
-      <p:sp>
-        <p:nvSpPr>
-          <p:cNvPr id="4" name="Slide Number Placeholder 3"/>
-          <p:cNvSpPr>
-            <a:spLocks noGrp="1"/>
-          </p:cNvSpPr>
-          <p:nvPr>
-            <p:ph type="sldNum" idx="5" sz="quarter"/>
-          </p:nvPr>
-        </p:nvSpPr>
-        <p:spPr/>
-      </p:sp>
-    </p:spTree>
-  </p:cSld>
-  <p:clrMapOvr>
-    <a:masterClrMapping/>
-  </p:clrMapOvr>
-</p:notes>
-</file>
-
-<file path=ppt/notesSlides/notesSlide2.xml><?xml version="1.0" encoding="utf-8"?>
-<p:notes xmlns:a="http://schemas.openxmlformats.org/drawingml/2006/main" xmlns:p="http://schemas.openxmlformats.org/presentationml/2006/main" xmlns:r="http://schemas.openxmlformats.org/officeDocument/2006/relationships">
-  <p:cSld>
-    <p:spTree>
-      <p:nvGrpSpPr>
-        <p:cNvPr id="1" name=""/>
-        <p:cNvGrpSpPr/>
-        <p:nvPr/>
-      </p:nvGrpSpPr>
-      <p:grpSpPr>
-        <a:xfrm>
-          <a:off x="0" y="0"/>
-          <a:ext cx="0" cy="0"/>
-          <a:chOff x="0" y="0"/>
-          <a:chExt cx="0" cy="0"/>
-        </a:xfrm>
-      </p:grpSpPr>
-      <p:sp>
-        <p:nvSpPr>
-          <p:cNvPr id="2" name="Slide Image Placeholder 1"/>
-          <p:cNvSpPr>
-            <a:spLocks noGrp="1"/>
-          </p:cNvSpPr>
-          <p:nvPr>
-            <p:ph type="sldImg" idx="2"/>
-          </p:nvPr>
-        </p:nvSpPr>
-        <p:spPr/>
-      </p:sp>
-      <p:sp>
-        <p:nvSpPr>
-          <p:cNvPr id="3" name="Notes Placeholder 2"/>
-          <p:cNvSpPr>
-            <a:spLocks noGrp="1"/>
-          </p:cNvSpPr>
-          <p:nvPr>
-            <p:ph type="body" idx="3" sz="quarter"/>
-          </p:nvPr>
-        </p:nvSpPr>
-        <p:spPr/>
-        <p:txBody>
-          <a:bodyPr/>
-          <a:lstStyle/>
-          <a:p>
-            <a:r>
-              <a:t>3 minutos. Sin apuntes. Es para recordar, no cuenta para nota.</a:t>
-            </a:r>
-          </a:p>
-        </p:txBody>
-      </p:sp>
-      <p:sp>
-        <p:nvSpPr>
-          <p:cNvPr id="4" name="Slide Number Placeholder 3"/>
-          <p:cNvSpPr>
-            <a:spLocks noGrp="1"/>
-          </p:cNvSpPr>
-          <p:nvPr>
-            <p:ph type="sldNum" idx="5" sz="quarter"/>
-          </p:nvPr>
-        </p:nvSpPr>
-        <p:spPr/>
-      </p:sp>
-    </p:spTree>
-  </p:cSld>
-  <p:clrMapOvr>
-    <a:masterClrMapping/>
-  </p:clrMapOvr>
-</p:notes>
-</file>
-
-<file path=ppt/notesSlides/notesSlide3.xml><?xml version="1.0" encoding="utf-8"?>
-<p:notes xmlns:a="http://schemas.openxmlformats.org/drawingml/2006/main" xmlns:p="http://schemas.openxmlformats.org/presentationml/2006/main" xmlns:r="http://schemas.openxmlformats.org/officeDocument/2006/relationships">
-  <p:cSld>
-    <p:spTree>
-      <p:nvGrpSpPr>
-        <p:cNvPr id="1" name=""/>
-        <p:cNvGrpSpPr/>
-        <p:nvPr/>
-      </p:nvGrpSpPr>
-      <p:grpSpPr>
-        <a:xfrm>
-          <a:off x="0" y="0"/>
-          <a:ext cx="0" cy="0"/>
-          <a:chOff x="0" y="0"/>
-          <a:chExt cx="0" cy="0"/>
-        </a:xfrm>
-      </p:grpSpPr>
-      <p:sp>
-        <p:nvSpPr>
-          <p:cNvPr id="2" name="Slide Image Placeholder 1"/>
-          <p:cNvSpPr>
-            <a:spLocks noGrp="1"/>
-          </p:cNvSpPr>
-          <p:nvPr>
-            <p:ph type="sldImg" idx="2"/>
-          </p:nvPr>
-        </p:nvSpPr>
-        <p:spPr/>
-      </p:sp>
-      <p:sp>
-        <p:nvSpPr>
-          <p:cNvPr id="3" name="Notes Placeholder 2"/>
-          <p:cNvSpPr>
-            <a:spLocks noGrp="1"/>
-          </p:cNvSpPr>
-          <p:nvPr>
-            <p:ph type="body" idx="3" sz="quarter"/>
-          </p:nvPr>
-        </p:nvSpPr>
-        <p:spPr/>
-        <p:txBody>
-          <a:bodyPr/>
-          <a:lstStyle/>
-          <a:p>
-            <a:r>
-              <a:t>Nadie tiene que contestar: solo pensarlo.</a:t>
-            </a:r>
-          </a:p>
-        </p:txBody>
-      </p:sp>
-      <p:sp>
-        <p:nvSpPr>
-          <p:cNvPr id="4" name="Slide Number Placeholder 3"/>
-          <p:cNvSpPr>
-            <a:spLocks noGrp="1"/>
-          </p:cNvSpPr>
-          <p:nvPr>
-            <p:ph type="sldNum" idx="5" sz="quarter"/>
-          </p:nvPr>
-        </p:nvSpPr>
-        <p:spPr/>
-      </p:sp>
-    </p:spTree>
-  </p:cSld>
-  <p:clrMapOvr>
-    <a:masterClrMapping/>
-  </p:clrMapOvr>
-</p:notes>
-</file>
-
-<file path=ppt/notesSlides/notesSlide4.xml><?xml version="1.0" encoding="utf-8"?>
-<p:notes xmlns:a="http://schemas.openxmlformats.org/drawingml/2006/main" xmlns:p="http://schemas.openxmlformats.org/presentationml/2006/main" xmlns:r="http://schemas.openxmlformats.org/officeDocument/2006/relationships">
-  <p:cSld>
-    <p:spTree>
-      <p:nvGrpSpPr>
-        <p:cNvPr id="1" name=""/>
-        <p:cNvGrpSpPr/>
-        <p:nvPr/>
-      </p:nvGrpSpPr>
-      <p:grpSpPr>
-        <a:xfrm>
-          <a:off x="0" y="0"/>
-          <a:ext cx="0" cy="0"/>
-          <a:chOff x="0" y="0"/>
-          <a:chExt cx="0" cy="0"/>
-        </a:xfrm>
-      </p:grpSpPr>
-      <p:sp>
-        <p:nvSpPr>
-          <p:cNvPr id="2" name="Slide Image Placeholder 1"/>
-          <p:cNvSpPr>
-            <a:spLocks noGrp="1"/>
-          </p:cNvSpPr>
-          <p:nvPr>
-            <p:ph type="sldImg" idx="2"/>
-          </p:nvPr>
-        </p:nvSpPr>
-        <p:spPr/>
-      </p:sp>
-      <p:sp>
-        <p:nvSpPr>
-          <p:cNvPr id="3" name="Notes Placeholder 2"/>
-          <p:cNvSpPr>
-            <a:spLocks noGrp="1"/>
-          </p:cNvSpPr>
-          <p:nvPr>
-            <p:ph type="body" idx="3" sz="quarter"/>
-          </p:nvPr>
-        </p:nvSpPr>
-        <p:spPr/>
-        <p:txBody>
-          <a:bodyPr/>
-          <a:lstStyle/>
-          <a:p>
-            <a:r>
-              <a:t>Dejar unos segundos para que piensen la respuesta fácil antes de enseñar los pasos.</a:t>
-            </a:r>
-          </a:p>
-        </p:txBody>
-      </p:sp>
-      <p:sp>
-        <p:nvSpPr>
-          <p:cNvPr id="4" name="Slide Number Placeholder 3"/>
-          <p:cNvSpPr>
-            <a:spLocks noGrp="1"/>
-          </p:cNvSpPr>
-          <p:nvPr>
-            <p:ph type="sldNum" idx="5" sz="quarter"/>
-          </p:nvPr>
-        </p:nvSpPr>
-        <p:spPr/>
-      </p:sp>
-    </p:spTree>
-  </p:cSld>
-  <p:clrMapOvr>
-    <a:masterClrMapping/>
-  </p:clrMapOvr>
-</p:notes>
-</file>
-
-<file path=ppt/notesSlides/notesSlide5.xml><?xml version="1.0" encoding="utf-8"?>
-<p:notes xmlns:a="http://schemas.openxmlformats.org/drawingml/2006/main" xmlns:p="http://schemas.openxmlformats.org/presentationml/2006/main" xmlns:r="http://schemas.openxmlformats.org/officeDocument/2006/relationships">
-  <p:cSld>
-    <p:spTree>
-      <p:nvGrpSpPr>
-        <p:cNvPr id="1" name=""/>
-        <p:cNvGrpSpPr/>
-        <p:nvPr/>
-      </p:nvGrpSpPr>
-      <p:grpSpPr>
-        <a:xfrm>
-          <a:off x="0" y="0"/>
-          <a:ext cx="0" cy="0"/>
-          <a:chOff x="0" y="0"/>
-          <a:chExt cx="0" cy="0"/>
-        </a:xfrm>
-      </p:grpSpPr>
-      <p:sp>
-        <p:nvSpPr>
-          <p:cNvPr id="2" name="Slide Image Placeholder 1"/>
-          <p:cNvSpPr>
-            <a:spLocks noGrp="1"/>
-          </p:cNvSpPr>
-          <p:nvPr>
-            <p:ph type="sldImg" idx="2"/>
-          </p:nvPr>
-        </p:nvSpPr>
-        <p:spPr/>
-      </p:sp>
-      <p:sp>
-        <p:nvSpPr>
-          <p:cNvPr id="3" name="Notes Placeholder 2"/>
-          <p:cNvSpPr>
-            <a:spLocks noGrp="1"/>
-          </p:cNvSpPr>
-          <p:nvPr>
-            <p:ph type="body" idx="3" sz="quarter"/>
-          </p:nvPr>
-        </p:nvSpPr>
-        <p:spPr/>
-        <p:txBody>
-          <a:bodyPr/>
-          <a:lstStyle/>
-          <a:p>
-            <a:r>
-              <a:t>Dejar 2 minutos para que lo escriban. La diapositiva siguiente muestra el resumen.</a:t>
-            </a:r>
-          </a:p>
-        </p:txBody>
-      </p:sp>
-      <p:sp>
-        <p:nvSpPr>
-          <p:cNvPr id="4" name="Slide Number Placeholder 3"/>
-          <p:cNvSpPr>
-            <a:spLocks noGrp="1"/>
-          </p:cNvSpPr>
-          <p:nvPr>
-            <p:ph type="sldNum" idx="5" sz="quarter"/>
-          </p:nvPr>
-        </p:nvSpPr>
-        <p:spPr/>
-      </p:sp>
-    </p:spTree>
-  </p:cSld>
-  <p:clrMapOvr>
-    <a:masterClrMapping/>
-  </p:clrMapOvr>
-</p:notes>
 </file>
 
 <file path=ppt/slideLayouts/slideLayout1.xml><?xml version="1.0" encoding="utf-8"?>

--- a/curso/pptx/S06.pptx
+++ b/curso/pptx/S06.pptx
@@ -4229,7 +4229,7 @@
                 </a:solidFill>
                 <a:latin typeface="Nunito Sans"/>
               </a:rPr>
-              <a:t>Iker lee en Instagram: «El agua con limón en ayunas quema grasa. Lo dice una influencer de fitness y lo hace todo mi gimnasio». Iker está seguro de que es verdad.</a:t>
+              <a:t>Un chico lee en Instagram: «El agua con limón en ayunas quema grasa. Lo dice una influencer de fitness y lo hace todo mi gimnasio». Está seguro de que es verdad.</a:t>
             </a:r>
           </a:p>
         </p:txBody>
@@ -4327,7 +4327,7 @@
                 </a:solidFill>
                 <a:latin typeface="Nunito Sans"/>
               </a:rPr>
-              <a:t>¿Lo sabe Iker? No: estar seguro no basta. Le faltan buenas razones.</a:t>
+              <a:t>¿Lo sabe? No: estar seguro no basta. Le faltan buenas razones.</a:t>
             </a:r>
           </a:p>
           <a:p>
@@ -4538,7 +4538,7 @@
                 </a:solidFill>
                 <a:latin typeface="Nunito Sans"/>
               </a:rPr>
-              <a:t>Omar: «Sé seguro que el agua con limón adelgaza. Lo he visto en un vídeo con tres millones de visitas».</a:t>
+              <a:t>Un chico: «Sé seguro que el agua con limón adelgaza. Lo he visto en un vídeo con tres millones de visitas».</a:t>
             </a:r>
           </a:p>
         </p:txBody>

--- a/curso/pptx/S06.pptx
+++ b/curso/pptx/S06.pptx
@@ -21,6 +21,7 @@
     <p:sldId id="269" r:id="rId21"/>
     <p:sldId id="270" r:id="rId22"/>
     <p:sldId id="271" r:id="rId23"/>
+    <p:sldId id="272" r:id="rId24"/>
   </p:sldIdLst>
   <p:sldSz cx="12192000" cy="6858000" type="screen4x3"/>
   <p:notesSz cx="6858000" cy="9144000"/>
@@ -3534,7 +3535,7 @@
                 </a:solidFill>
                 <a:latin typeface="Nunito Sans"/>
               </a:rPr>
-              <a:t>PENSAMIENTO CRÍTICO · SESIÓN 6 · UNIDAD 1 · PENSAR, CREER Y SABER</a:t>
+              <a:t>PENSAMIENTO CRÍTICO · SESIÓN 6 · UNIDAD 2 · AUTORIDAD E INFLUENCIA</a:t>
             </a:r>
           </a:p>
         </p:txBody>
@@ -3573,7 +3574,7 @@
                 </a:solidFill>
                 <a:latin typeface="Fredoka"/>
               </a:rPr>
-              <a:t>Repaso y examen de la unidad 1</a:t>
+              <a:t>¿Qué es una autoridad?</a:t>
             </a:r>
           </a:p>
         </p:txBody>
@@ -3612,7 +3613,7 @@
                 </a:solidFill>
                 <a:latin typeface="Nunito Sans"/>
               </a:rPr>
-              <a:t>Repasamos la unidad: pensar críticamente, hechos y opiniones, creer y saber, buenas preguntas y por qué creemos lo que creemos.</a:t>
+              <a:t>Una autoridad por poder puede mandarte; una autoridad por saber te da buenas razones para creer algo.</a:t>
             </a:r>
           </a:p>
         </p:txBody>
@@ -3677,7 +3678,7 @@
                 </a:solidFill>
                 <a:latin typeface="Nunito Sans"/>
               </a:rPr>
-              <a:t>BLOQUE 1 · REPASO DE LA UNIDAD</a:t>
+              <a:t>BLOQUE 2 · CASOS RESUELTOS</a:t>
             </a:r>
           </a:p>
         </p:txBody>
@@ -3716,20 +3717,63 @@
                 </a:solidFill>
                 <a:latin typeface="Fredoka"/>
               </a:rPr>
-              <a:t>Sesión 5 · ¿Por qué creemos lo que creemos?</a:t>
-            </a:r>
-          </a:p>
-        </p:txBody>
-      </p:sp>
-      <p:sp>
-        <p:nvSpPr>
-          <p:cNvPr id="4" name="TextBox 3"/>
+              <a:t>Caso 1 · El árbitro</a:t>
+            </a:r>
+          </a:p>
+        </p:txBody>
+      </p:sp>
+      <p:sp>
+        <p:nvSpPr>
+          <p:cNvPr id="4" name="Rectangle 3"/>
+          <p:cNvSpPr/>
+          <p:nvPr/>
+        </p:nvSpPr>
+        <p:spPr>
+          <a:xfrm>
+            <a:off x="640000" y="1600000"/>
+            <a:ext cx="10912000" cy="1100000"/>
+          </a:xfrm>
+          <a:prstGeom prst="rect">
+            <a:avLst/>
+          </a:prstGeom>
+          <a:solidFill>
+            <a:srgbClr val="FFFFFF"/>
+          </a:solidFill>
+          <a:ln>
+            <a:noFill/>
+          </a:ln>
+        </p:spPr>
+        <p:style>
+          <a:lnRef idx="1">
+            <a:schemeClr val="accent1"/>
+          </a:lnRef>
+          <a:fillRef idx="3">
+            <a:schemeClr val="accent1"/>
+          </a:fillRef>
+          <a:effectRef idx="2">
+            <a:schemeClr val="accent1"/>
+          </a:effectRef>
+          <a:fontRef idx="minor">
+            <a:schemeClr val="lt1"/>
+          </a:fontRef>
+        </p:style>
+        <p:txBody>
+          <a:bodyPr rtlCol="0" anchor="ctr"/>
+          <a:lstStyle/>
+          <a:p>
+            <a:pPr algn="ctr"/>
+          </a:p>
+        </p:txBody>
+      </p:sp>
+      <p:sp>
+        <p:nvSpPr>
+          <p:cNvPr id="5" name="TextBox 4"/>
           <p:cNvSpPr txBox="1"/>
           <p:nvPr/>
         </p:nvSpPr>
         <p:spPr>
           <a:xfrm>
-            <a:off x="840000" y="1730000"/>
+            <a:off x="840000" y="1650000"/>
             <a:ext cx="10512000" cy="1000000"/>
           </a:xfrm>
           <a:prstGeom prst="rect">
@@ -3739,6 +3783,45 @@
         </p:spPr>
         <p:txBody>
           <a:bodyPr wrap="square" anchor="ctr">
+            <a:spAutoFit/>
+          </a:bodyPr>
+          <a:lstStyle/>
+          <a:p>
+            <a:pPr>
+              <a:spcAft>
+                <a:spcPts val="1170"/>
+              </a:spcAft>
+            </a:pPr>
+            <a:r>
+              <a:rPr sz="2600" b="1">
+                <a:solidFill>
+                  <a:srgbClr val="1F2A44"/>
+                </a:solidFill>
+                <a:latin typeface="Nunito Sans"/>
+              </a:rPr>
+              <a:t>En un partido del Athletic, el árbitro pita penalti. En la repetición se ve claro que no lo era.</a:t>
+            </a:r>
+          </a:p>
+        </p:txBody>
+      </p:sp>
+      <p:sp>
+        <p:nvSpPr>
+          <p:cNvPr id="6" name="TextBox 5"/>
+          <p:cNvSpPr txBox="1"/>
+          <p:nvPr/>
+        </p:nvSpPr>
+        <p:spPr>
+          <a:xfrm>
+            <a:off x="640000" y="2900000"/>
+            <a:ext cx="10912000" cy="3500000"/>
+          </a:xfrm>
+          <a:prstGeom prst="rect">
+            <a:avLst/>
+          </a:prstGeom>
+          <a:noFill/>
+        </p:spPr>
+        <p:txBody>
+          <a:bodyPr wrap="square">
             <a:spAutoFit/>
           </a:bodyPr>
           <a:lstStyle/>
@@ -3749,197 +3832,97 @@
               </a:spcAft>
             </a:pPr>
             <a:r>
+              <a:rPr sz="2400" b="1">
+                <a:solidFill>
+                  <a:srgbClr val="E8793A"/>
+                </a:solidFill>
+                <a:latin typeface="Nunito Sans"/>
+              </a:rPr>
+              <a:t>1. </a:t>
+            </a:r>
+            <a:r>
               <a:rPr sz="2400" b="0">
                 <a:solidFill>
                   <a:srgbClr val="1F2A44"/>
                 </a:solidFill>
                 <a:latin typeface="Nunito Sans"/>
               </a:rPr>
-              <a:t>Cuatro caminos que, por sí solos, no son razones:</a:t>
-            </a:r>
-          </a:p>
-        </p:txBody>
-      </p:sp>
-      <p:sp>
-        <p:nvSpPr>
-          <p:cNvPr id="5" name="TextBox 4"/>
-          <p:cNvSpPr txBox="1"/>
-          <p:nvPr/>
-        </p:nvSpPr>
-        <p:spPr>
-          <a:xfrm>
-            <a:off x="640000" y="3000000"/>
-            <a:ext cx="10912000" cy="3458000"/>
-          </a:xfrm>
-          <a:prstGeom prst="rect">
-            <a:avLst/>
-          </a:prstGeom>
-          <a:noFill/>
-        </p:spPr>
-        <p:txBody>
-          <a:bodyPr wrap="square">
-            <a:spAutoFit/>
-          </a:bodyPr>
-          <a:lstStyle/>
+              <a:t>¿Qué autoridad tiene el árbitro? Por poder: el reglamento le da la última palabra.</a:t>
+            </a:r>
+          </a:p>
           <a:p>
             <a:pPr>
               <a:spcAft>
-                <a:spcPts val="1260"/>
+                <a:spcPts val="1080"/>
               </a:spcAft>
             </a:pPr>
             <a:r>
-              <a:rPr sz="2800" b="1">
+              <a:rPr sz="2400" b="1">
                 <a:solidFill>
                   <a:srgbClr val="E8793A"/>
                 </a:solidFill>
                 <a:latin typeface="Nunito Sans"/>
               </a:rPr>
-              <a:t>• </a:t>
-            </a:r>
-            <a:r>
-              <a:rPr sz="2800" b="1">
+              <a:t>2. </a:t>
+            </a:r>
+            <a:r>
+              <a:rPr sz="2400" b="0">
                 <a:solidFill>
                   <a:srgbClr val="1F2A44"/>
                 </a:solidFill>
                 <a:latin typeface="Nunito Sans"/>
               </a:rPr>
-              <a:t>Costumbre:</a:t>
-            </a:r>
-            <a:r>
-              <a:rPr sz="2800" b="0">
-                <a:solidFill>
-                  <a:srgbClr val="1F2A44"/>
-                </a:solidFill>
-                <a:latin typeface="Nunito Sans"/>
-              </a:rPr>
-              <a:t> «siempre se ha hecho así»</a:t>
+              <a:t>¿Acierta siempre? No: es una persona y puede equivocarse.</a:t>
             </a:r>
           </a:p>
           <a:p>
             <a:pPr>
               <a:spcAft>
-                <a:spcPts val="1260"/>
+                <a:spcPts val="1080"/>
               </a:spcAft>
             </a:pPr>
             <a:r>
-              <a:rPr sz="2800" b="1">
+              <a:rPr sz="2400" b="1">
                 <a:solidFill>
                   <a:srgbClr val="E8793A"/>
                 </a:solidFill>
                 <a:latin typeface="Nunito Sans"/>
               </a:rPr>
-              <a:t>• </a:t>
-            </a:r>
-            <a:r>
-              <a:rPr sz="2800" b="1">
+              <a:t>3. </a:t>
+            </a:r>
+            <a:r>
+              <a:rPr sz="2400" b="0">
                 <a:solidFill>
                   <a:srgbClr val="1F2A44"/>
                 </a:solidFill>
                 <a:latin typeface="Nunito Sans"/>
               </a:rPr>
-              <a:t>Grupo:</a:t>
-            </a:r>
-            <a:r>
-              <a:rPr sz="2800" b="0">
-                <a:solidFill>
-                  <a:srgbClr val="1F2A44"/>
-                </a:solidFill>
-                <a:latin typeface="Nunito Sans"/>
-              </a:rPr>
-              <a:t> «lo cree toda mi cuadrilla»</a:t>
+              <a:t>¿Hay que obedecerle? En el partido, sí: su decisión cuenta.</a:t>
             </a:r>
           </a:p>
           <a:p>
             <a:pPr>
               <a:spcAft>
-                <a:spcPts val="1260"/>
+                <a:spcPts val="1080"/>
               </a:spcAft>
             </a:pPr>
             <a:r>
-              <a:rPr sz="2800" b="1">
+              <a:rPr sz="2400" b="1">
                 <a:solidFill>
                   <a:srgbClr val="E8793A"/>
                 </a:solidFill>
                 <a:latin typeface="Nunito Sans"/>
               </a:rPr>
-              <a:t>• </a:t>
-            </a:r>
-            <a:r>
-              <a:rPr sz="2800" b="1">
+              <a:t>4. </a:t>
+            </a:r>
+            <a:r>
+              <a:rPr sz="2400" b="0">
                 <a:solidFill>
                   <a:srgbClr val="1F2A44"/>
                 </a:solidFill>
                 <a:latin typeface="Nunito Sans"/>
               </a:rPr>
-              <a:t>Autoridad:</a:t>
-            </a:r>
-            <a:r>
-              <a:rPr sz="2800" b="0">
-                <a:solidFill>
-                  <a:srgbClr val="1F2A44"/>
-                </a:solidFill>
-                <a:latin typeface="Nunito Sans"/>
-              </a:rPr>
-              <a:t> «lo ha dicho alguien importante»</a:t>
-            </a:r>
-          </a:p>
-          <a:p>
-            <a:pPr>
-              <a:spcAft>
-                <a:spcPts val="1260"/>
-              </a:spcAft>
-            </a:pPr>
-            <a:r>
-              <a:rPr sz="2800" b="1">
-                <a:solidFill>
-                  <a:srgbClr val="E8793A"/>
-                </a:solidFill>
-                <a:latin typeface="Nunito Sans"/>
-              </a:rPr>
-              <a:t>• </a:t>
-            </a:r>
-            <a:r>
-              <a:rPr sz="2800" b="1">
-                <a:solidFill>
-                  <a:srgbClr val="1F2A44"/>
-                </a:solidFill>
-                <a:latin typeface="Nunito Sans"/>
-              </a:rPr>
-              <a:t>Emoción:</a:t>
-            </a:r>
-            <a:r>
-              <a:rPr sz="2800" b="0">
-                <a:solidFill>
-                  <a:srgbClr val="1F2A44"/>
-                </a:solidFill>
-                <a:latin typeface="Nunito Sans"/>
-              </a:rPr>
-              <a:t> «me gusta creerlo» o «me da miedo»</a:t>
-            </a:r>
-          </a:p>
-          <a:p>
-            <a:pPr>
-              <a:spcAft>
-                <a:spcPts val="1260"/>
-              </a:spcAft>
-            </a:pPr>
-            <a:r>
-              <a:rPr sz="2800" b="1">
-                <a:solidFill>
-                  <a:srgbClr val="E8793A"/>
-                </a:solidFill>
-                <a:latin typeface="Nunito Sans"/>
-              </a:rPr>
-              <a:t>• </a:t>
-            </a:r>
-            <a:r>
-              <a:rPr sz="2800" b="0">
-                <a:solidFill>
-                  <a:srgbClr val="1F2A44"/>
-                </a:solidFill>
-                <a:latin typeface="Nunito Sans"/>
-              </a:rPr>
-              <a:t>El rey que cojeaba: todo el palacio cojeaba sin razón</a:t>
+              <a:t>Conclusión: obedecer al árbitro no significa creer que tiene razón.</a:t>
             </a:r>
           </a:p>
         </p:txBody>
@@ -3958,7 +3941,7 @@
     <p:bg>
       <p:bgPr>
         <a:solidFill>
-          <a:srgbClr val="1F2A44"/>
+          <a:srgbClr val="FBF7EF"/>
         </a:solidFill>
         <a:effectLst/>
       </p:bgPr>
@@ -3978,8 +3961,8 @@
         </p:nvSpPr>
         <p:spPr>
           <a:xfrm>
-            <a:off x="640000" y="2300000"/>
-            <a:ext cx="10912000" cy="500000"/>
+            <a:off x="640000" y="380000"/>
+            <a:ext cx="10912000" cy="420000"/>
           </a:xfrm>
           <a:prstGeom prst="rect">
             <a:avLst/>
@@ -3994,17 +3977,17 @@
           <a:p>
             <a:pPr>
               <a:spcAft>
-                <a:spcPts val="810"/>
+                <a:spcPts val="630"/>
               </a:spcAft>
             </a:pPr>
             <a:r>
-              <a:rPr sz="1800" b="1">
-                <a:solidFill>
-                  <a:srgbClr val="F4B183"/>
-                </a:solidFill>
-                <a:latin typeface="Nunito Sans"/>
-              </a:rPr>
-              <a:t>BLOQUE 2</a:t>
+              <a:rPr sz="1400" b="1">
+                <a:solidFill>
+                  <a:srgbClr val="E8793A"/>
+                </a:solidFill>
+                <a:latin typeface="Nunito Sans"/>
+              </a:rPr>
+              <a:t>BLOQUE 2 · CASOS RESUELTOS</a:t>
             </a:r>
           </a:p>
         </p:txBody>
@@ -4017,7 +4000,7 @@
         </p:nvSpPr>
         <p:spPr>
           <a:xfrm>
-            <a:off x="640000" y="2800000"/>
+            <a:off x="640000" y="760000"/>
             <a:ext cx="10912000" cy="800000"/>
           </a:xfrm>
           <a:prstGeom prst="rect">
@@ -4033,17 +4016,222 @@
           <a:p>
             <a:pPr>
               <a:spcAft>
-                <a:spcPts val="2160"/>
+                <a:spcPts val="1710"/>
               </a:spcAft>
             </a:pPr>
             <a:r>
-              <a:rPr sz="4800" b="1">
-                <a:solidFill>
-                  <a:srgbClr val="FBF7EF"/>
+              <a:rPr sz="3800" b="1">
+                <a:solidFill>
+                  <a:srgbClr val="1F2A44"/>
                 </a:solidFill>
                 <a:latin typeface="Fredoka"/>
               </a:rPr>
-              <a:t>Un caso con todo</a:t>
+              <a:t>Caso 2 · La mecánica</a:t>
+            </a:r>
+          </a:p>
+        </p:txBody>
+      </p:sp>
+      <p:sp>
+        <p:nvSpPr>
+          <p:cNvPr id="4" name="Rectangle 3"/>
+          <p:cNvSpPr/>
+          <p:nvPr/>
+        </p:nvSpPr>
+        <p:spPr>
+          <a:xfrm>
+            <a:off x="640000" y="1600000"/>
+            <a:ext cx="10912000" cy="1100000"/>
+          </a:xfrm>
+          <a:prstGeom prst="rect">
+            <a:avLst/>
+          </a:prstGeom>
+          <a:solidFill>
+            <a:srgbClr val="FFFFFF"/>
+          </a:solidFill>
+          <a:ln>
+            <a:noFill/>
+          </a:ln>
+        </p:spPr>
+        <p:style>
+          <a:lnRef idx="1">
+            <a:schemeClr val="accent1"/>
+          </a:lnRef>
+          <a:fillRef idx="3">
+            <a:schemeClr val="accent1"/>
+          </a:fillRef>
+          <a:effectRef idx="2">
+            <a:schemeClr val="accent1"/>
+          </a:effectRef>
+          <a:fontRef idx="minor">
+            <a:schemeClr val="lt1"/>
+          </a:fontRef>
+        </p:style>
+        <p:txBody>
+          <a:bodyPr rtlCol="0" anchor="ctr"/>
+          <a:lstStyle/>
+          <a:p>
+            <a:pPr algn="ctr"/>
+          </a:p>
+        </p:txBody>
+      </p:sp>
+      <p:sp>
+        <p:nvSpPr>
+          <p:cNvPr id="5" name="TextBox 4"/>
+          <p:cNvSpPr txBox="1"/>
+          <p:nvPr/>
+        </p:nvSpPr>
+        <p:spPr>
+          <a:xfrm>
+            <a:off x="840000" y="1650000"/>
+            <a:ext cx="10512000" cy="1000000"/>
+          </a:xfrm>
+          <a:prstGeom prst="rect">
+            <a:avLst/>
+          </a:prstGeom>
+          <a:noFill/>
+        </p:spPr>
+        <p:txBody>
+          <a:bodyPr wrap="square" anchor="ctr">
+            <a:spAutoFit/>
+          </a:bodyPr>
+          <a:lstStyle/>
+          <a:p>
+            <a:pPr>
+              <a:spcAft>
+                <a:spcPts val="1170"/>
+              </a:spcAft>
+            </a:pPr>
+            <a:r>
+              <a:rPr sz="2600" b="1">
+                <a:solidFill>
+                  <a:srgbClr val="1F2A44"/>
+                </a:solidFill>
+                <a:latin typeface="Nunito Sans"/>
+              </a:rPr>
+              <a:t>Una chica lleva la bici al taller. La mecánica le dice que la cadena está gastada y que hay que cambiarla.</a:t>
+            </a:r>
+          </a:p>
+        </p:txBody>
+      </p:sp>
+      <p:sp>
+        <p:nvSpPr>
+          <p:cNvPr id="6" name="TextBox 5"/>
+          <p:cNvSpPr txBox="1"/>
+          <p:nvPr/>
+        </p:nvSpPr>
+        <p:spPr>
+          <a:xfrm>
+            <a:off x="640000" y="2900000"/>
+            <a:ext cx="10912000" cy="3500000"/>
+          </a:xfrm>
+          <a:prstGeom prst="rect">
+            <a:avLst/>
+          </a:prstGeom>
+          <a:noFill/>
+        </p:spPr>
+        <p:txBody>
+          <a:bodyPr wrap="square">
+            <a:spAutoFit/>
+          </a:bodyPr>
+          <a:lstStyle/>
+          <a:p>
+            <a:pPr>
+              <a:spcAft>
+                <a:spcPts val="1080"/>
+              </a:spcAft>
+            </a:pPr>
+            <a:r>
+              <a:rPr sz="2400" b="1">
+                <a:solidFill>
+                  <a:srgbClr val="E8793A"/>
+                </a:solidFill>
+                <a:latin typeface="Nunito Sans"/>
+              </a:rPr>
+              <a:t>1. </a:t>
+            </a:r>
+            <a:r>
+              <a:rPr sz="2400" b="0">
+                <a:solidFill>
+                  <a:srgbClr val="1F2A44"/>
+                </a:solidFill>
+                <a:latin typeface="Nunito Sans"/>
+              </a:rPr>
+              <a:t>¿Qué autoridad tiene? Por saber: arregla bicis todos los días.</a:t>
+            </a:r>
+          </a:p>
+          <a:p>
+            <a:pPr>
+              <a:spcAft>
+                <a:spcPts val="1080"/>
+              </a:spcAft>
+            </a:pPr>
+            <a:r>
+              <a:rPr sz="2400" b="1">
+                <a:solidFill>
+                  <a:srgbClr val="E8793A"/>
+                </a:solidFill>
+                <a:latin typeface="Nunito Sans"/>
+              </a:rPr>
+              <a:t>2. </a:t>
+            </a:r>
+            <a:r>
+              <a:rPr sz="2400" b="0">
+                <a:solidFill>
+                  <a:srgbClr val="1F2A44"/>
+                </a:solidFill>
+                <a:latin typeface="Nunito Sans"/>
+              </a:rPr>
+              <a:t>¿Puede obligar a esa chica? No: no manda sobre ella.</a:t>
+            </a:r>
+          </a:p>
+          <a:p>
+            <a:pPr>
+              <a:spcAft>
+                <a:spcPts val="1080"/>
+              </a:spcAft>
+            </a:pPr>
+            <a:r>
+              <a:rPr sz="2400" b="1">
+                <a:solidFill>
+                  <a:srgbClr val="E8793A"/>
+                </a:solidFill>
+                <a:latin typeface="Nunito Sans"/>
+              </a:rPr>
+              <a:t>3. </a:t>
+            </a:r>
+            <a:r>
+              <a:rPr sz="2400" b="0">
+                <a:solidFill>
+                  <a:srgbClr val="1F2A44"/>
+                </a:solidFill>
+                <a:latin typeface="Nunito Sans"/>
+              </a:rPr>
+              <a:t>¿Por qué creerla? Porque sabe del tema y puede enseñarle la cadena gastada.</a:t>
+            </a:r>
+          </a:p>
+          <a:p>
+            <a:pPr>
+              <a:spcAft>
+                <a:spcPts val="1080"/>
+              </a:spcAft>
+            </a:pPr>
+            <a:r>
+              <a:rPr sz="2400" b="1">
+                <a:solidFill>
+                  <a:srgbClr val="E8793A"/>
+                </a:solidFill>
+                <a:latin typeface="Nunito Sans"/>
+              </a:rPr>
+              <a:t>4. </a:t>
+            </a:r>
+            <a:r>
+              <a:rPr sz="2400" b="0">
+                <a:solidFill>
+                  <a:srgbClr val="1F2A44"/>
+                </a:solidFill>
+                <a:latin typeface="Nunito Sans"/>
+              </a:rPr>
+              <a:t>Conclusión: le hago caso por lo que sabe, no porque me mande.</a:t>
             </a:r>
           </a:p>
         </p:txBody>
@@ -4108,7 +4296,7 @@
                 </a:solidFill>
                 <a:latin typeface="Nunito Sans"/>
               </a:rPr>
-              <a:t>BLOQUE 2 · UN CASO CON TODO</a:t>
+              <a:t>BLOQUE 2 · CASOS RESUELTOS</a:t>
             </a:r>
           </a:p>
         </p:txBody>
@@ -4147,7 +4335,7 @@
                 </a:solidFill>
                 <a:latin typeface="Fredoka"/>
               </a:rPr>
-              <a:t>Agua con limón</a:t>
+              <a:t>Caso 3 · La directora y el fútbol</a:t>
             </a:r>
           </a:p>
         </p:txBody>
@@ -4229,7 +4417,7 @@
                 </a:solidFill>
                 <a:latin typeface="Nunito Sans"/>
               </a:rPr>
-              <a:t>Un chico lee en Instagram: «El agua con limón en ayunas quema grasa. Lo dice una influencer de fitness y lo hace todo mi gimnasio». Está seguro de que es verdad.</a:t>
+              <a:t>La directora del instituto dice en el patio: «Este año el Athletic gana la Liga, seguro».</a:t>
             </a:r>
           </a:p>
         </p:txBody>
@@ -4277,7 +4465,7 @@
                 </a:solidFill>
                 <a:latin typeface="Nunito Sans"/>
               </a:rPr>
-              <a:t>¿Hecho, gusto u opinión? Es una afirmación de hecho: verdadera o falsa.</a:t>
+              <a:t>¿Tiene autoridad? Por poder, en el instituto: puede poner normas.</a:t>
             </a:r>
           </a:p>
           <a:p>
@@ -4302,7 +4490,7 @@
                 </a:solidFill>
                 <a:latin typeface="Nunito Sans"/>
               </a:rPr>
-              <a:t>¿Qué caminos hay? Autoridad (la influencer) y grupo (el gimnasio).</a:t>
+              <a:t>¿Tiene autoridad por saber sobre fútbol? No más que cualquier aficionado.</a:t>
             </a:r>
           </a:p>
           <a:p>
@@ -4327,7 +4515,7 @@
                 </a:solidFill>
                 <a:latin typeface="Nunito Sans"/>
               </a:rPr>
-              <a:t>¿Lo sabe? No: estar seguro no basta. Le faltan buenas razones.</a:t>
+              <a:t>Su cargo no hace que su opinión sobre fútbol valga más.</a:t>
             </a:r>
           </a:p>
           <a:p>
@@ -4352,7 +4540,7 @@
                 </a:solidFill>
                 <a:latin typeface="Nunito Sans"/>
               </a:rPr>
-              <a:t>Conclusión: la pregunta es «¿cómo lo sabes?». Hay que mirar qué dicen fuentes médicas.</a:t>
+              <a:t>Conclusión: el poder en un sitio no da saber en todos los temas.</a:t>
             </a:r>
           </a:p>
         </p:txBody>
@@ -4417,7 +4605,7 @@
                 </a:solidFill>
                 <a:latin typeface="Nunito Sans"/>
               </a:rPr>
-              <a:t>CASO TRAMPA · BLOQUE 2 · UN CASO CON TODO</a:t>
+              <a:t>CASO TRAMPA · BLOQUE 2 · CASOS RESUELTOS</a:t>
             </a:r>
           </a:p>
         </p:txBody>
@@ -4456,7 +4644,7 @@
                 </a:solidFill>
                 <a:latin typeface="Fredoka"/>
               </a:rPr>
-              <a:t>⚠ Lo sé seguro</a:t>
+              <a:t>⚠ El socorrista</a:t>
             </a:r>
           </a:p>
         </p:txBody>
@@ -4538,7 +4726,7 @@
                 </a:solidFill>
                 <a:latin typeface="Nunito Sans"/>
               </a:rPr>
-              <a:t>Un chico: «Sé seguro que el agua con limón adelgaza. Lo he visto en un vídeo con tres millones de visitas».</a:t>
+              <a:t>En la playa, el socorrista pita: «¡Fuera del agua, hay corrientes!». Un chico: «Solo tiene poder. Tener poder no es tener razón».</a:t>
             </a:r>
           </a:p>
         </p:txBody>
@@ -4586,7 +4774,7 @@
                 </a:solidFill>
                 <a:latin typeface="Nunito Sans"/>
               </a:rPr>
-              <a:t>Dice «sé» y «seguro». ¿Lo sabe?</a:t>
+              <a:t>¿Obedecerle es solo obedecer al que manda?</a:t>
             </a:r>
           </a:p>
           <a:p>
@@ -4611,7 +4799,7 @@
                 </a:solidFill>
                 <a:latin typeface="Nunito Sans"/>
               </a:rPr>
-              <a:t>«Adelgaza» dice cómo son las cosas: es una afirmación de hecho, verdadera o falsa.</a:t>
+              <a:t>Tiene poder: su cargo le deja mandar en la playa.</a:t>
             </a:r>
           </a:p>
           <a:p>
@@ -4636,7 +4824,7 @@
                 </a:solidFill>
                 <a:latin typeface="Nunito Sans"/>
               </a:rPr>
-              <a:t>«Seguro» es un sentimiento. Las visitas son el camino del grupo.</a:t>
+              <a:t>Pero también sabe: está formado para ver corrientes y mira el mar todo el día.</a:t>
             </a:r>
           </a:p>
           <a:p>
@@ -4661,7 +4849,7 @@
                 </a:solidFill>
                 <a:latin typeface="Nunito Sans"/>
               </a:rPr>
-              <a:t>No tiene buenas razones: no sabe quién lo dice ni cómo lo sabe.</a:t>
+              <a:t>Aquí las dos autoridades van juntas, y hay muy buenas razones para salir.</a:t>
             </a:r>
           </a:p>
           <a:p>
@@ -4686,7 +4874,7 @@
                 </a:solidFill>
                 <a:latin typeface="Nunito Sans"/>
               </a:rPr>
-              <a:t>Conclusión: decir «sé» no es saber. Lo cree, y todavía no ha preguntado «¿cómo lo sabes?».</a:t>
+              <a:t>Conclusión: «tener poder no es tener razón» no quiere decir que quien manda se equivoque. Mira si también sabe.</a:t>
             </a:r>
           </a:p>
         </p:txBody>
@@ -4942,7 +5130,7 @@
                 </a:solidFill>
                 <a:latin typeface="Nunito Sans"/>
               </a:rPr>
-              <a:t>Pensar críticamente es pedir y dar razones: «¿cómo lo sabes?».</a:t>
+              <a:t>Una autoridad es alguien a quien hacemos caso por su poder o por su saber.</a:t>
             </a:r>
           </a:p>
           <a:p>
@@ -4967,7 +5155,7 @@
                 </a:solidFill>
                 <a:latin typeface="Nunito Sans"/>
               </a:rPr>
-              <a:t>Los hechos dicen cómo son las cosas; los gustos hablan de mí; las opiniones se defienden con razones.</a:t>
+              <a:t>La autoridad por poder puede mandar; la autoridad por saber da razones.</a:t>
             </a:r>
           </a:p>
           <a:p>
@@ -4992,7 +5180,7 @@
                 </a:solidFill>
                 <a:latin typeface="Nunito Sans"/>
               </a:rPr>
-              <a:t>Sentirse seguro no es saber, y costumbre, grupo, autoridad o emoción no son razones por sí solos.</a:t>
+              <a:t>Tener poder no es lo mismo que tener razón, aunque a veces se tienen las dos.</a:t>
             </a:r>
           </a:p>
         </p:txBody>
@@ -5057,6 +5245,149 @@
                 </a:solidFill>
                 <a:latin typeface="Nunito Sans"/>
               </a:rPr>
+              <a:t>VÍDEO</a:t>
+            </a:r>
+          </a:p>
+        </p:txBody>
+      </p:sp>
+      <p:sp>
+        <p:nvSpPr>
+          <p:cNvPr id="3" name="TextBox 2"/>
+          <p:cNvSpPr txBox="1"/>
+          <p:nvPr/>
+        </p:nvSpPr>
+        <p:spPr>
+          <a:xfrm>
+            <a:off x="640000" y="760000"/>
+            <a:ext cx="10912000" cy="800000"/>
+          </a:xfrm>
+          <a:prstGeom prst="rect">
+            <a:avLst/>
+          </a:prstGeom>
+          <a:noFill/>
+        </p:spPr>
+        <p:txBody>
+          <a:bodyPr wrap="square">
+            <a:spAutoFit/>
+          </a:bodyPr>
+          <a:lstStyle/>
+          <a:p>
+            <a:pPr>
+              <a:spcAft>
+                <a:spcPts val="1620"/>
+              </a:spcAft>
+            </a:pPr>
+            <a:r>
+              <a:rPr sz="3600" b="1">
+                <a:solidFill>
+                  <a:srgbClr val="FBF7EF"/>
+                </a:solidFill>
+                <a:latin typeface="Fredoka"/>
+              </a:rPr>
+              <a:t>Diferencia entre poder y autoridad por conocimiento</a:t>
+            </a:r>
+          </a:p>
+        </p:txBody>
+      </p:sp>
+      <p:sp>
+        <p:nvSpPr>
+          <p:cNvPr id="4" name="TextBox 3"/>
+          <p:cNvSpPr txBox="1"/>
+          <p:nvPr/>
+        </p:nvSpPr>
+        <p:spPr>
+          <a:xfrm>
+            <a:off x="640000" y="2200000"/>
+            <a:ext cx="10912000" cy="2000000"/>
+          </a:xfrm>
+          <a:prstGeom prst="rect">
+            <a:avLst/>
+          </a:prstGeom>
+          <a:noFill/>
+        </p:spPr>
+        <p:txBody>
+          <a:bodyPr wrap="square">
+            <a:spAutoFit/>
+          </a:bodyPr>
+          <a:lstStyle/>
+          <a:p>
+            <a:pPr>
+              <a:spcAft>
+                <a:spcPts val="1080"/>
+              </a:spcAft>
+            </a:pPr>
+            <a:r>
+              <a:rPr sz="2400" b="0">
+                <a:solidFill>
+                  <a:srgbClr val="C9D3E6"/>
+                </a:solidFill>
+                <a:latin typeface="Nunito Sans"/>
+              </a:rPr>
+              <a:t>Que vean con otros ejemplos que obedecer a quien manda no es lo mismo que creer a quien sabe.</a:t>
+            </a:r>
+          </a:p>
+        </p:txBody>
+      </p:sp>
+    </p:spTree>
+  </p:cSld>
+  <p:clrMapOvr>
+    <a:masterClrMapping/>
+  </p:clrMapOvr>
+</p:sld>
+</file>
+
+<file path=ppt/slides/slide17.xml><?xml version="1.0" encoding="utf-8"?>
+<p:sld xmlns:a="http://schemas.openxmlformats.org/drawingml/2006/main" xmlns:p="http://schemas.openxmlformats.org/presentationml/2006/main" xmlns:r="http://schemas.openxmlformats.org/officeDocument/2006/relationships">
+  <p:cSld>
+    <p:bg>
+      <p:bgPr>
+        <a:solidFill>
+          <a:srgbClr val="1F2A44"/>
+        </a:solidFill>
+        <a:effectLst/>
+      </p:bgPr>
+    </p:bg>
+    <p:spTree>
+      <p:nvGrpSpPr>
+        <p:cNvPr id="1" name=""/>
+        <p:cNvGrpSpPr/>
+        <p:nvPr/>
+      </p:nvGrpSpPr>
+      <p:grpSpPr/>
+      <p:sp>
+        <p:nvSpPr>
+          <p:cNvPr id="2" name="TextBox 1"/>
+          <p:cNvSpPr txBox="1"/>
+          <p:nvPr/>
+        </p:nvSpPr>
+        <p:spPr>
+          <a:xfrm>
+            <a:off x="640000" y="380000"/>
+            <a:ext cx="10912000" cy="420000"/>
+          </a:xfrm>
+          <a:prstGeom prst="rect">
+            <a:avLst/>
+          </a:prstGeom>
+          <a:noFill/>
+        </p:spPr>
+        <p:txBody>
+          <a:bodyPr wrap="square">
+            <a:spAutoFit/>
+          </a:bodyPr>
+          <a:lstStyle/>
+          <a:p>
+            <a:pPr>
+              <a:spcAft>
+                <a:spcPts val="630"/>
+              </a:spcAft>
+            </a:pPr>
+            <a:r>
+              <a:rPr sz="1400" b="1">
+                <a:solidFill>
+                  <a:srgbClr val="F4B183"/>
+                </a:solidFill>
+                <a:latin typeface="Nunito Sans"/>
+              </a:rPr>
               <a:t>AHORA, LA HOJA DEL DÍA</a:t>
             </a:r>
           </a:p>
@@ -5498,7 +5829,7 @@
                 </a:solidFill>
                 <a:latin typeface="Nunito Sans"/>
               </a:rPr>
-              <a:t>Sin apuntes. Junto a cada respuesta, marca «seguro» o «dudo».</a:t>
+              <a:t>1.ª pasada: sin apuntes, con bolígrafo. 2.ª pasada: con los apuntes, en otro color. Marca «seguro» o «dudo» en cada respuesta.</a:t>
             </a:r>
           </a:p>
         </p:txBody>
@@ -5650,7 +5981,7 @@
                 </a:solidFill>
                 <a:latin typeface="Nunito Sans"/>
               </a:rPr>
-              <a:t>Creer algo porque «siempre se ha hecho así» es el camino de la ______.  (sesión 5)</a:t>
+              <a:t>Pensar críticamente es pedir y dar ______.  (sesión 5)</a:t>
             </a:r>
           </a:p>
           <a:p>
@@ -5675,7 +6006,7 @@
                 </a:solidFill>
                 <a:latin typeface="Nunito Sans"/>
               </a:rPr>
-              <a:t>Creer algo porque me gusta creerlo o me da miedo es el camino de la ______.  (sesión 5)</a:t>
+              <a:t>Tener un ______ no es manipular, pero hay que tenerlo en cuenta.  (sesión 5)</a:t>
             </a:r>
           </a:p>
           <a:p>
@@ -5700,7 +6031,7 @@
                 </a:solidFill>
                 <a:latin typeface="Nunito Sans"/>
               </a:rPr>
-              <a:t>Pensar críticamente es ______ y ______ razones.  (sesión 1)</a:t>
+              <a:t>Pensar críticamente no es ______ todo ni llevar siempre la contraria.  (sesión 1)</a:t>
             </a:r>
           </a:p>
         </p:txBody>
@@ -5852,7 +6183,7 @@
                 </a:solidFill>
                 <a:latin typeface="Nunito Sans"/>
               </a:rPr>
-              <a:t>Creer algo porque «siempre se ha hecho así» es el camino de la </a:t>
+              <a:t>Pensar críticamente es pedir y dar </a:t>
             </a:r>
             <a:r>
               <a:rPr sz="2600" b="1">
@@ -5861,7 +6192,7 @@
                 </a:solidFill>
                 <a:latin typeface="Nunito Sans"/>
               </a:rPr>
-              <a:t>costumbre</a:t>
+              <a:t>razones</a:t>
             </a:r>
             <a:r>
               <a:rPr sz="2600" b="0">
@@ -5895,7 +6226,7 @@
                 </a:solidFill>
                 <a:latin typeface="Nunito Sans"/>
               </a:rPr>
-              <a:t>Creer algo porque me gusta creerlo o me da miedo es el camino de la </a:t>
+              <a:t>Tener un </a:t>
             </a:r>
             <a:r>
               <a:rPr sz="2600" b="1">
@@ -5904,7 +6235,7 @@
                 </a:solidFill>
                 <a:latin typeface="Nunito Sans"/>
               </a:rPr>
-              <a:t>emoción</a:t>
+              <a:t>interés</a:t>
             </a:r>
             <a:r>
               <a:rPr sz="2600" b="0">
@@ -5913,7 +6244,7 @@
                 </a:solidFill>
                 <a:latin typeface="Nunito Sans"/>
               </a:rPr>
-              <a:t>.  (sesión 5)</a:t>
+              <a:t> no es manipular, pero hay que tenerlo en cuenta.  (sesión 5)</a:t>
             </a:r>
           </a:p>
           <a:p>
@@ -5938,7 +6269,7 @@
                 </a:solidFill>
                 <a:latin typeface="Nunito Sans"/>
               </a:rPr>
-              <a:t>Pensar críticamente es </a:t>
+              <a:t>Pensar críticamente no es </a:t>
             </a:r>
             <a:r>
               <a:rPr sz="2600" b="1">
@@ -5947,7 +6278,7 @@
                 </a:solidFill>
                 <a:latin typeface="Nunito Sans"/>
               </a:rPr>
-              <a:t>pedir</a:t>
+              <a:t>criticar</a:t>
             </a:r>
             <a:r>
               <a:rPr sz="2600" b="0">
@@ -5956,25 +6287,7 @@
                 </a:solidFill>
                 <a:latin typeface="Nunito Sans"/>
               </a:rPr>
-              <a:t> y </a:t>
-            </a:r>
-            <a:r>
-              <a:rPr sz="2600" b="1">
-                <a:solidFill>
-                  <a:srgbClr val="1F2A44"/>
-                </a:solidFill>
-                <a:latin typeface="Nunito Sans"/>
-              </a:rPr>
-              <a:t>dar</a:t>
-            </a:r>
-            <a:r>
-              <a:rPr sz="2600" b="0">
-                <a:solidFill>
-                  <a:srgbClr val="1F2A44"/>
-                </a:solidFill>
-                <a:latin typeface="Nunito Sans"/>
-              </a:rPr>
-              <a:t> razones.  (sesión 1)</a:t>
+              <a:t> todo ni llevar siempre la contraria.  (sesión 1)</a:t>
             </a:r>
           </a:p>
         </p:txBody>
@@ -6121,7 +6434,7 @@
                 </a:solidFill>
                 <a:latin typeface="Nunito Sans"/>
               </a:rPr>
-              <a:t>En esta unidad has aprendido cinco herramientas para no creerte cualquier cosa.</a:t>
+              <a:t>Tu entrenador te dice: «Sal al campo». Tu médica te dice: «Tómate este jarabe». Los dos «mandan».</a:t>
             </a:r>
           </a:p>
         </p:txBody>
@@ -6160,7 +6473,7 @@
                 </a:solidFill>
                 <a:latin typeface="Nunito Sans"/>
               </a:rPr>
-              <a:t>¿Cuál de ellas has usado ya fuera de clase?</a:t>
+              <a:t>¿Les haces caso por el mismo motivo?</a:t>
             </a:r>
           </a:p>
         </p:txBody>
@@ -6264,7 +6577,7 @@
                 </a:solidFill>
                 <a:latin typeface="Fredoka"/>
               </a:rPr>
-              <a:t>Repaso de la unidad</a:t>
+              <a:t>Dos tipos de autoridad</a:t>
             </a:r>
           </a:p>
         </p:txBody>
@@ -6329,7 +6642,7 @@
                 </a:solidFill>
                 <a:latin typeface="Nunito Sans"/>
               </a:rPr>
-              <a:t>BLOQUE 1 · REPASO DE LA UNIDAD</a:t>
+              <a:t>BLOQUE 1 · DOS TIPOS DE AUTORIDAD</a:t>
             </a:r>
           </a:p>
         </p:txBody>
@@ -6368,7 +6681,7 @@
                 </a:solidFill>
                 <a:latin typeface="Fredoka"/>
               </a:rPr>
-              <a:t>Sesión 1 · Pensar críticamente</a:t>
+              <a:t>Autoridad</a:t>
             </a:r>
           </a:p>
         </p:txBody>
@@ -6450,43 +6763,7 @@
                 </a:solidFill>
                 <a:latin typeface="Nunito Sans"/>
               </a:rPr>
-              <a:t>Pensar críticamente es </a:t>
-            </a:r>
-            <a:r>
-              <a:rPr sz="2800" b="1">
-                <a:solidFill>
-                  <a:srgbClr val="1F2A44"/>
-                </a:solidFill>
-                <a:latin typeface="Nunito Sans"/>
-              </a:rPr>
-              <a:t>pedir</a:t>
-            </a:r>
-            <a:r>
-              <a:rPr sz="2800" b="1">
-                <a:solidFill>
-                  <a:srgbClr val="1F2A44"/>
-                </a:solidFill>
-                <a:latin typeface="Nunito Sans"/>
-              </a:rPr>
-              <a:t> y </a:t>
-            </a:r>
-            <a:r>
-              <a:rPr sz="2800" b="1">
-                <a:solidFill>
-                  <a:srgbClr val="1F2A44"/>
-                </a:solidFill>
-                <a:latin typeface="Nunito Sans"/>
-              </a:rPr>
-              <a:t>dar</a:t>
-            </a:r>
-            <a:r>
-              <a:rPr sz="2800" b="1">
-                <a:solidFill>
-                  <a:srgbClr val="1F2A44"/>
-                </a:solidFill>
-                <a:latin typeface="Nunito Sans"/>
-              </a:rPr>
-              <a:t> razones antes de aceptar o rechazar una idea.</a:t>
+              <a:t>Una autoridad es alguien a quien hacemos caso por lo que es o por lo que sabe.</a:t>
             </a:r>
           </a:p>
         </p:txBody>
@@ -6528,13 +6805,22 @@
               <a:t>• </a:t>
             </a:r>
             <a:r>
+              <a:rPr sz="2800" b="1">
+                <a:solidFill>
+                  <a:srgbClr val="1F2A44"/>
+                </a:solidFill>
+                <a:latin typeface="Nunito Sans"/>
+              </a:rPr>
+              <a:t>Por poder:</a:t>
+            </a:r>
+            <a:r>
               <a:rPr sz="2800" b="0">
                 <a:solidFill>
                   <a:srgbClr val="1F2A44"/>
                 </a:solidFill>
                 <a:latin typeface="Nunito Sans"/>
               </a:rPr>
-              <a:t>No es criticarlo todo ni desconfiar de todo</a:t>
+              <a:t> puede mandar, porque tiene un cargo</a:t>
             </a:r>
           </a:p>
           <a:p>
@@ -6553,13 +6839,22 @@
               <a:t>• </a:t>
             </a:r>
             <a:r>
+              <a:rPr sz="2800" b="1">
+                <a:solidFill>
+                  <a:srgbClr val="1F2A44"/>
+                </a:solidFill>
+                <a:latin typeface="Nunito Sans"/>
+              </a:rPr>
+              <a:t>Por saber:</a:t>
+            </a:r>
+            <a:r>
               <a:rPr sz="2800" b="0">
                 <a:solidFill>
                   <a:srgbClr val="1F2A44"/>
                 </a:solidFill>
                 <a:latin typeface="Nunito Sans"/>
               </a:rPr>
-              <a:t>El crédulo se lo cree todo; el desconfiado, nada</a:t>
+              <a:t> sabe mucho de un tema</a:t>
             </a:r>
           </a:p>
           <a:p>
@@ -6584,7 +6879,7 @@
                 </a:solidFill>
                 <a:latin typeface="Nunito Sans"/>
               </a:rPr>
-              <a:t>Pregunta clave: «¿cómo lo sabes?»</a:t>
+              <a:t>Una misma persona puede tener las dos</a:t>
             </a:r>
           </a:p>
         </p:txBody>
@@ -6649,7 +6944,7 @@
                 </a:solidFill>
                 <a:latin typeface="Nunito Sans"/>
               </a:rPr>
-              <a:t>BLOQUE 1 · REPASO DE LA UNIDAD</a:t>
+              <a:t>BLOQUE 1 · DOS TIPOS DE AUTORIDAD</a:t>
             </a:r>
           </a:p>
         </p:txBody>
@@ -6688,7 +6983,7 @@
                 </a:solidFill>
                 <a:latin typeface="Fredoka"/>
               </a:rPr>
-              <a:t>Sesión 2 · Hechos, gustos y opiniones</a:t>
+              <a:t>Poder y saber</a:t>
             </a:r>
           </a:p>
         </p:txBody>
@@ -6703,7 +6998,7 @@
         </p:nvGraphicFramePr>
         <p:xfrm>
           <a:off x="640000" y="1700000"/>
-          <a:ext cx="10912000" cy="2400000"/>
+          <a:ext cx="10912000" cy="3000000"/>
         </p:xfrm>
         <a:graphic>
           <a:graphicData uri="http://schemas.openxmlformats.org/drawingml/2006/table">
@@ -6729,7 +7024,7 @@
                           </a:solidFill>
                           <a:latin typeface="Fredoka"/>
                         </a:rPr>
-                        <a:t>Tipo</a:t>
+                        <a:t/>
                       </a:r>
                     </a:p>
                   </a:txBody>
@@ -6751,7 +7046,7 @@
                           </a:solidFill>
                           <a:latin typeface="Fredoka"/>
                         </a:rPr>
-                        <a:t>Cómo se reconoce</a:t>
+                        <a:t>Autoridad por poder</a:t>
                       </a:r>
                     </a:p>
                   </a:txBody>
@@ -6773,7 +7068,7 @@
                           </a:solidFill>
                           <a:latin typeface="Fredoka"/>
                         </a:rPr>
-                        <a:t>Ejemplo</a:t>
+                        <a:t>Autoridad por saber</a:t>
                       </a:r>
                     </a:p>
                   </a:txBody>
@@ -6797,7 +7092,7 @@
                           </a:solidFill>
                           <a:latin typeface="Nunito Sans"/>
                         </a:rPr>
-                        <a:t>Hecho</a:t>
+                        <a:t>Qué tiene</a:t>
                       </a:r>
                     </a:p>
                   </a:txBody>
@@ -6819,7 +7114,7 @@
                           </a:solidFill>
                           <a:latin typeface="Nunito Sans"/>
                         </a:rPr>
-                        <a:t>Dice cómo son las cosas: verdadero o falso</a:t>
+                        <a:t>Un cargo: puede mandar</a:t>
                       </a:r>
                     </a:p>
                   </a:txBody>
@@ -6841,7 +7136,7 @@
                           </a:solidFill>
                           <a:latin typeface="Nunito Sans"/>
                         </a:rPr>
-                        <a:t>«San Mamés está en Bilbao»</a:t>
+                        <a:t>Conocimiento de un tema</a:t>
                       </a:r>
                     </a:p>
                   </a:txBody>
@@ -6865,7 +7160,7 @@
                           </a:solidFill>
                           <a:latin typeface="Nunito Sans"/>
                         </a:rPr>
-                        <a:t>Gusto</a:t>
+                        <a:t>Ejemplos</a:t>
                       </a:r>
                     </a:p>
                   </a:txBody>
@@ -6887,7 +7182,7 @@
                           </a:solidFill>
                           <a:latin typeface="Nunito Sans"/>
                         </a:rPr>
-                        <a:t>Habla de lo que me gusta a mí</a:t>
+                        <a:t>Directora, árbitro, policía</a:t>
                       </a:r>
                     </a:p>
                   </a:txBody>
@@ -6909,7 +7204,7 @@
                           </a:solidFill>
                           <a:latin typeface="Nunito Sans"/>
                         </a:rPr>
-                        <a:t>«Me encanta el recreo»</a:t>
+                        <a:t>Médica, mecánico, profesor de Química</a:t>
                       </a:r>
                     </a:p>
                   </a:txBody>
@@ -6933,7 +7228,7 @@
                           </a:solidFill>
                           <a:latin typeface="Nunito Sans"/>
                         </a:rPr>
-                        <a:t>Opinión</a:t>
+                        <a:t>Qué me pide</a:t>
                       </a:r>
                     </a:p>
                   </a:txBody>
@@ -6955,7 +7250,7 @@
                           </a:solidFill>
                           <a:latin typeface="Nunito Sans"/>
                         </a:rPr>
-                        <a:t>Qué es bueno o qué deberíamos hacer: con razones</a:t>
+                        <a:t>Que obedezca</a:t>
                       </a:r>
                     </a:p>
                   </a:txBody>
@@ -6977,13 +7272,81 @@
                           </a:solidFill>
                           <a:latin typeface="Nunito Sans"/>
                         </a:rPr>
-                        <a:t>«Habría que alargar el recreo»</a:t>
+                        <a:t>Que me crea lo que dice</a:t>
                       </a:r>
                     </a:p>
                   </a:txBody>
                   <a:tcPr>
                     <a:solidFill>
                       <a:srgbClr val="FFFFFF"/>
+                    </a:solidFill>
+                  </a:tcPr>
+                </a:tc>
+              </a:tr>
+              <a:tr h="600000">
+                <a:tc>
+                  <a:txBody>
+                    <a:bodyPr/>
+                    <a:lstStyle/>
+                    <a:p>
+                      <a:r>
+                        <a:rPr sz="2000" b="1">
+                          <a:solidFill>
+                            <a:srgbClr val="1F2A44"/>
+                          </a:solidFill>
+                          <a:latin typeface="Nunito Sans"/>
+                        </a:rPr>
+                        <a:t>Por qué hacer caso</a:t>
+                      </a:r>
+                    </a:p>
+                  </a:txBody>
+                  <a:tcPr>
+                    <a:solidFill>
+                      <a:srgbClr val="EAF0F7"/>
+                    </a:solidFill>
+                  </a:tcPr>
+                </a:tc>
+                <a:tc>
+                  <a:txBody>
+                    <a:bodyPr/>
+                    <a:lstStyle/>
+                    <a:p>
+                      <a:r>
+                        <a:rPr sz="2000" b="0">
+                          <a:solidFill>
+                            <a:srgbClr val="1F2A44"/>
+                          </a:solidFill>
+                          <a:latin typeface="Nunito Sans"/>
+                        </a:rPr>
+                        <a:t>Por las normas del grupo</a:t>
+                      </a:r>
+                    </a:p>
+                  </a:txBody>
+                  <a:tcPr>
+                    <a:solidFill>
+                      <a:srgbClr val="EAF0F7"/>
+                    </a:solidFill>
+                  </a:tcPr>
+                </a:tc>
+                <a:tc>
+                  <a:txBody>
+                    <a:bodyPr/>
+                    <a:lstStyle/>
+                    <a:p>
+                      <a:r>
+                        <a:rPr sz="2000" b="0">
+                          <a:solidFill>
+                            <a:srgbClr val="1F2A44"/>
+                          </a:solidFill>
+                          <a:latin typeface="Nunito Sans"/>
+                        </a:rPr>
+                        <a:t>Porque sabe y tiene pruebas</a:t>
+                      </a:r>
+                    </a:p>
+                  </a:txBody>
+                  <a:tcPr>
+                    <a:solidFill>
+                      <a:srgbClr val="EAF0F7"/>
                     </a:solidFill>
                   </a:tcPr>
                 </a:tc>
@@ -7052,7 +7415,7 @@
                 </a:solidFill>
                 <a:latin typeface="Nunito Sans"/>
               </a:rPr>
-              <a:t>BLOQUE 1 · REPASO DE LA UNIDAD</a:t>
+              <a:t>BLOQUE 1 · DOS TIPOS DE AUTORIDAD</a:t>
             </a:r>
           </a:p>
         </p:txBody>
@@ -7091,221 +7454,134 @@
                 </a:solidFill>
                 <a:latin typeface="Fredoka"/>
               </a:rPr>
-              <a:t>Sesión 3 · Creer, saber y estar seguro</a:t>
-            </a:r>
-          </a:p>
-        </p:txBody>
-      </p:sp>
-      <p:graphicFrame>
-        <p:nvGraphicFramePr>
-          <p:cNvPr id="4" name="Table 3"/>
-          <p:cNvGraphicFramePr>
-            <a:graphicFrameLocks noGrp="1"/>
-          </p:cNvGraphicFramePr>
+              <a:t>Cuidado: tener poder no es tener razón</a:t>
+            </a:r>
+          </a:p>
+        </p:txBody>
+      </p:sp>
+      <p:sp>
+        <p:nvSpPr>
+          <p:cNvPr id="4" name="TextBox 3"/>
+          <p:cNvSpPr txBox="1"/>
           <p:nvPr/>
-        </p:nvGraphicFramePr>
-        <p:xfrm>
-          <a:off x="640000" y="1700000"/>
-          <a:ext cx="10912000" cy="2400000"/>
-        </p:xfrm>
-        <a:graphic>
-          <a:graphicData uri="http://schemas.openxmlformats.org/drawingml/2006/table">
-            <a:tbl>
-              <a:tblPr firstRow="1" bandRow="1">
-                <a:tableStyleId>{5C22544A-7EE6-4342-B048-85BDC9FD1C3A}</a:tableStyleId>
-              </a:tblPr>
-              <a:tblGrid>
-                <a:gridCol w="5456000"/>
-                <a:gridCol w="5456000"/>
-              </a:tblGrid>
-              <a:tr h="600000">
-                <a:tc>
-                  <a:txBody>
-                    <a:bodyPr/>
-                    <a:lstStyle/>
-                    <a:p>
-                      <a:r>
-                        <a:rPr sz="2000" b="1">
-                          <a:solidFill>
-                            <a:srgbClr val="FBF7EF"/>
-                          </a:solidFill>
-                          <a:latin typeface="Fredoka"/>
-                        </a:rPr>
-                        <a:t>Palabra</a:t>
-                      </a:r>
-                    </a:p>
-                  </a:txBody>
-                  <a:tcPr>
-                    <a:solidFill>
-                      <a:srgbClr val="1F2A44"/>
-                    </a:solidFill>
-                  </a:tcPr>
-                </a:tc>
-                <a:tc>
-                  <a:txBody>
-                    <a:bodyPr/>
-                    <a:lstStyle/>
-                    <a:p>
-                      <a:r>
-                        <a:rPr sz="2000" b="1">
-                          <a:solidFill>
-                            <a:srgbClr val="FBF7EF"/>
-                          </a:solidFill>
-                          <a:latin typeface="Fredoka"/>
-                        </a:rPr>
-                        <a:t>Qué es</a:t>
-                      </a:r>
-                    </a:p>
-                  </a:txBody>
-                  <a:tcPr>
-                    <a:solidFill>
-                      <a:srgbClr val="1F2A44"/>
-                    </a:solidFill>
-                  </a:tcPr>
-                </a:tc>
-              </a:tr>
-              <a:tr h="600000">
-                <a:tc>
-                  <a:txBody>
-                    <a:bodyPr/>
-                    <a:lstStyle/>
-                    <a:p>
-                      <a:r>
-                        <a:rPr sz="2000" b="1">
-                          <a:solidFill>
-                            <a:srgbClr val="1F2A44"/>
-                          </a:solidFill>
-                          <a:latin typeface="Nunito Sans"/>
-                        </a:rPr>
-                        <a:t>Creer</a:t>
-                      </a:r>
-                    </a:p>
-                  </a:txBody>
-                  <a:tcPr>
-                    <a:solidFill>
-                      <a:srgbClr val="FFFFFF"/>
-                    </a:solidFill>
-                  </a:tcPr>
-                </a:tc>
-                <a:tc>
-                  <a:txBody>
-                    <a:bodyPr/>
-                    <a:lstStyle/>
-                    <a:p>
-                      <a:r>
-                        <a:rPr sz="2000" b="0">
-                          <a:solidFill>
-                            <a:srgbClr val="1F2A44"/>
-                          </a:solidFill>
-                          <a:latin typeface="Nunito Sans"/>
-                        </a:rPr>
-                        <a:t>Pensar que algo es verdad</a:t>
-                      </a:r>
-                    </a:p>
-                  </a:txBody>
-                  <a:tcPr>
-                    <a:solidFill>
-                      <a:srgbClr val="FFFFFF"/>
-                    </a:solidFill>
-                  </a:tcPr>
-                </a:tc>
-              </a:tr>
-              <a:tr h="600000">
-                <a:tc>
-                  <a:txBody>
-                    <a:bodyPr/>
-                    <a:lstStyle/>
-                    <a:p>
-                      <a:r>
-                        <a:rPr sz="2000" b="1">
-                          <a:solidFill>
-                            <a:srgbClr val="1F2A44"/>
-                          </a:solidFill>
-                          <a:latin typeface="Nunito Sans"/>
-                        </a:rPr>
-                        <a:t>Saber</a:t>
-                      </a:r>
-                    </a:p>
-                  </a:txBody>
-                  <a:tcPr>
-                    <a:solidFill>
-                      <a:srgbClr val="EAF0F7"/>
-                    </a:solidFill>
-                  </a:tcPr>
-                </a:tc>
-                <a:tc>
-                  <a:txBody>
-                    <a:bodyPr/>
-                    <a:lstStyle/>
-                    <a:p>
-                      <a:r>
-                        <a:rPr sz="2000" b="0">
-                          <a:solidFill>
-                            <a:srgbClr val="1F2A44"/>
-                          </a:solidFill>
-                          <a:latin typeface="Nunito Sans"/>
-                        </a:rPr>
-                        <a:t>Creer algo verdadero con buenas razones</a:t>
-                      </a:r>
-                    </a:p>
-                  </a:txBody>
-                  <a:tcPr>
-                    <a:solidFill>
-                      <a:srgbClr val="EAF0F7"/>
-                    </a:solidFill>
-                  </a:tcPr>
-                </a:tc>
-              </a:tr>
-              <a:tr h="600000">
-                <a:tc>
-                  <a:txBody>
-                    <a:bodyPr/>
-                    <a:lstStyle/>
-                    <a:p>
-                      <a:r>
-                        <a:rPr sz="2000" b="1">
-                          <a:solidFill>
-                            <a:srgbClr val="1F2A44"/>
-                          </a:solidFill>
-                          <a:latin typeface="Nunito Sans"/>
-                        </a:rPr>
-                        <a:t>Estar seguro</a:t>
-                      </a:r>
-                    </a:p>
-                  </a:txBody>
-                  <a:tcPr>
-                    <a:solidFill>
-                      <a:srgbClr val="FFFFFF"/>
-                    </a:solidFill>
-                  </a:tcPr>
-                </a:tc>
-                <a:tc>
-                  <a:txBody>
-                    <a:bodyPr/>
-                    <a:lstStyle/>
-                    <a:p>
-                      <a:r>
-                        <a:rPr sz="2000" b="0">
-                          <a:solidFill>
-                            <a:srgbClr val="1F2A44"/>
-                          </a:solidFill>
-                          <a:latin typeface="Nunito Sans"/>
-                        </a:rPr>
-                        <a:t>Un sentimiento: puede fallar</a:t>
-                      </a:r>
-                    </a:p>
-                  </a:txBody>
-                  <a:tcPr>
-                    <a:solidFill>
-                      <a:srgbClr val="FFFFFF"/>
-                    </a:solidFill>
-                  </a:tcPr>
-                </a:tc>
-              </a:tr>
-            </a:tbl>
-          </a:graphicData>
-        </a:graphic>
-      </p:graphicFrame>
+        </p:nvSpPr>
+        <p:spPr>
+          <a:xfrm>
+            <a:off x="640000" y="1650000"/>
+            <a:ext cx="10912000" cy="4808000"/>
+          </a:xfrm>
+          <a:prstGeom prst="rect">
+            <a:avLst/>
+          </a:prstGeom>
+          <a:noFill/>
+        </p:spPr>
+        <p:txBody>
+          <a:bodyPr wrap="square">
+            <a:spAutoFit/>
+          </a:bodyPr>
+          <a:lstStyle/>
+          <a:p>
+            <a:pPr>
+              <a:spcAft>
+                <a:spcPts val="1260"/>
+              </a:spcAft>
+            </a:pPr>
+            <a:r>
+              <a:rPr sz="2800" b="1">
+                <a:solidFill>
+                  <a:srgbClr val="E8793A"/>
+                </a:solidFill>
+                <a:latin typeface="Nunito Sans"/>
+              </a:rPr>
+              <a:t>• </a:t>
+            </a:r>
+            <a:r>
+              <a:rPr sz="2800" b="0">
+                <a:solidFill>
+                  <a:srgbClr val="1F2A44"/>
+                </a:solidFill>
+                <a:latin typeface="Nunito Sans"/>
+              </a:rPr>
+              <a:t>El árbitro manda en el partido, pero puede equivocarse</a:t>
+            </a:r>
+          </a:p>
+          <a:p>
+            <a:pPr>
+              <a:spcAft>
+                <a:spcPts val="1260"/>
+              </a:spcAft>
+            </a:pPr>
+            <a:r>
+              <a:rPr sz="2800" b="1">
+                <a:solidFill>
+                  <a:srgbClr val="E8793A"/>
+                </a:solidFill>
+                <a:latin typeface="Nunito Sans"/>
+              </a:rPr>
+              <a:t>• </a:t>
+            </a:r>
+            <a:r>
+              <a:rPr sz="2800" b="0">
+                <a:solidFill>
+                  <a:srgbClr val="1F2A44"/>
+                </a:solidFill>
+                <a:latin typeface="Nunito Sans"/>
+              </a:rPr>
+              <a:t>Obedecer no significa que quien manda tenga razón</a:t>
+            </a:r>
+          </a:p>
+          <a:p>
+            <a:pPr>
+              <a:spcAft>
+                <a:spcPts val="1260"/>
+              </a:spcAft>
+            </a:pPr>
+            <a:r>
+              <a:rPr sz="2800" b="1">
+                <a:solidFill>
+                  <a:srgbClr val="E8793A"/>
+                </a:solidFill>
+                <a:latin typeface="Nunito Sans"/>
+              </a:rPr>
+              <a:t>• </a:t>
+            </a:r>
+            <a:r>
+              <a:rPr sz="2800" b="0">
+                <a:solidFill>
+                  <a:srgbClr val="1F2A44"/>
+                </a:solidFill>
+                <a:latin typeface="Nunito Sans"/>
+              </a:rPr>
+              <a:t>Nadie sabe de todo por ser jefe</a:t>
+            </a:r>
+          </a:p>
+          <a:p>
+            <a:pPr>
+              <a:spcAft>
+                <a:spcPts val="1260"/>
+              </a:spcAft>
+            </a:pPr>
+            <a:r>
+              <a:rPr sz="2800" b="1">
+                <a:solidFill>
+                  <a:srgbClr val="E8793A"/>
+                </a:solidFill>
+                <a:latin typeface="Nunito Sans"/>
+              </a:rPr>
+              <a:t>• </a:t>
+            </a:r>
+            <a:r>
+              <a:rPr sz="2800" b="0">
+                <a:solidFill>
+                  <a:srgbClr val="1F2A44"/>
+                </a:solidFill>
+                <a:latin typeface="Nunito Sans"/>
+              </a:rPr>
+              <a:t>Por su saber, un experto no puede mandarte: solo darte razones</a:t>
+            </a:r>
+          </a:p>
+        </p:txBody>
+      </p:sp>
     </p:spTree>
   </p:cSld>
   <p:clrMapOvr>
@@ -7320,7 +7596,7 @@
     <p:bg>
       <p:bgPr>
         <a:solidFill>
-          <a:srgbClr val="FBF7EF"/>
+          <a:srgbClr val="1F2A44"/>
         </a:solidFill>
         <a:effectLst/>
       </p:bgPr>
@@ -7340,8 +7616,8 @@
         </p:nvSpPr>
         <p:spPr>
           <a:xfrm>
-            <a:off x="640000" y="380000"/>
-            <a:ext cx="10912000" cy="420000"/>
+            <a:off x="640000" y="2300000"/>
+            <a:ext cx="10912000" cy="500000"/>
           </a:xfrm>
           <a:prstGeom prst="rect">
             <a:avLst/>
@@ -7356,17 +7632,17 @@
           <a:p>
             <a:pPr>
               <a:spcAft>
-                <a:spcPts val="630"/>
+                <a:spcPts val="810"/>
               </a:spcAft>
             </a:pPr>
             <a:r>
-              <a:rPr sz="1400" b="1">
-                <a:solidFill>
-                  <a:srgbClr val="E8793A"/>
-                </a:solidFill>
-                <a:latin typeface="Nunito Sans"/>
-              </a:rPr>
-              <a:t>BLOQUE 1 · REPASO DE LA UNIDAD</a:t>
+              <a:rPr sz="1800" b="1">
+                <a:solidFill>
+                  <a:srgbClr val="F4B183"/>
+                </a:solidFill>
+                <a:latin typeface="Nunito Sans"/>
+              </a:rPr>
+              <a:t>BLOQUE 2</a:t>
             </a:r>
           </a:p>
         </p:txBody>
@@ -7379,7 +7655,7 @@
         </p:nvSpPr>
         <p:spPr>
           <a:xfrm>
-            <a:off x="640000" y="760000"/>
+            <a:off x="640000" y="2800000"/>
             <a:ext cx="10912000" cy="800000"/>
           </a:xfrm>
           <a:prstGeom prst="rect">
@@ -7395,320 +7671,21 @@
           <a:p>
             <a:pPr>
               <a:spcAft>
-                <a:spcPts val="1710"/>
+                <a:spcPts val="2160"/>
               </a:spcAft>
             </a:pPr>
             <a:r>
-              <a:rPr sz="3800" b="1">
-                <a:solidFill>
-                  <a:srgbClr val="1F2A44"/>
+              <a:rPr sz="4800" b="1">
+                <a:solidFill>
+                  <a:srgbClr val="FBF7EF"/>
                 </a:solidFill>
                 <a:latin typeface="Fredoka"/>
               </a:rPr>
-              <a:t>Sesión 4 · Hacer buenas preguntas</a:t>
-            </a:r>
-          </a:p>
-        </p:txBody>
-      </p:sp>
-      <p:graphicFrame>
-        <p:nvGraphicFramePr>
-          <p:cNvPr id="4" name="Table 3"/>
-          <p:cNvGraphicFramePr>
-            <a:graphicFrameLocks noGrp="1"/>
-          </p:cNvGraphicFramePr>
-          <p:nvPr/>
-        </p:nvGraphicFramePr>
-        <p:xfrm>
-          <a:off x="640000" y="1700000"/>
-          <a:ext cx="10912000" cy="2400000"/>
-        </p:xfrm>
-        <a:graphic>
-          <a:graphicData uri="http://schemas.openxmlformats.org/drawingml/2006/table">
-            <a:tbl>
-              <a:tblPr firstRow="1" bandRow="1">
-                <a:tableStyleId>{5C22544A-7EE6-4342-B048-85BDC9FD1C3A}</a:tableStyleId>
-              </a:tblPr>
-              <a:tblGrid>
-                <a:gridCol w="3637333"/>
-                <a:gridCol w="3637333"/>
-                <a:gridCol w="3637334"/>
-              </a:tblGrid>
-              <a:tr h="600000">
-                <a:tc>
-                  <a:txBody>
-                    <a:bodyPr/>
-                    <a:lstStyle/>
-                    <a:p>
-                      <a:r>
-                        <a:rPr sz="2000" b="1">
-                          <a:solidFill>
-                            <a:srgbClr val="FBF7EF"/>
-                          </a:solidFill>
-                          <a:latin typeface="Fredoka"/>
-                        </a:rPr>
-                        <a:t>Pregunta</a:t>
-                      </a:r>
-                    </a:p>
-                  </a:txBody>
-                  <a:tcPr>
-                    <a:solidFill>
-                      <a:srgbClr val="1F2A44"/>
-                    </a:solidFill>
-                  </a:tcPr>
-                </a:tc>
-                <a:tc>
-                  <a:txBody>
-                    <a:bodyPr/>
-                    <a:lstStyle/>
-                    <a:p>
-                      <a:r>
-                        <a:rPr sz="2000" b="1">
-                          <a:solidFill>
-                            <a:srgbClr val="FBF7EF"/>
-                          </a:solidFill>
-                          <a:latin typeface="Fredoka"/>
-                        </a:rPr>
-                        <a:t>Qué pide</a:t>
-                      </a:r>
-                    </a:p>
-                  </a:txBody>
-                  <a:tcPr>
-                    <a:solidFill>
-                      <a:srgbClr val="1F2A44"/>
-                    </a:solidFill>
-                  </a:tcPr>
-                </a:tc>
-                <a:tc>
-                  <a:txBody>
-                    <a:bodyPr/>
-                    <a:lstStyle/>
-                    <a:p>
-                      <a:r>
-                        <a:rPr sz="2000" b="1">
-                          <a:solidFill>
-                            <a:srgbClr val="FBF7EF"/>
-                          </a:solidFill>
-                          <a:latin typeface="Fredoka"/>
-                        </a:rPr>
-                        <a:t>Ejemplo</a:t>
-                      </a:r>
-                    </a:p>
-                  </a:txBody>
-                  <a:tcPr>
-                    <a:solidFill>
-                      <a:srgbClr val="1F2A44"/>
-                    </a:solidFill>
-                  </a:tcPr>
-                </a:tc>
-              </a:tr>
-              <a:tr h="600000">
-                <a:tc>
-                  <a:txBody>
-                    <a:bodyPr/>
-                    <a:lstStyle/>
-                    <a:p>
-                      <a:r>
-                        <a:rPr sz="2000" b="1">
-                          <a:solidFill>
-                            <a:srgbClr val="1F2A44"/>
-                          </a:solidFill>
-                          <a:latin typeface="Nunito Sans"/>
-                        </a:rPr>
-                        <a:t>Cerrada</a:t>
-                      </a:r>
-                    </a:p>
-                  </a:txBody>
-                  <a:tcPr>
-                    <a:solidFill>
-                      <a:srgbClr val="FFFFFF"/>
-                    </a:solidFill>
-                  </a:tcPr>
-                </a:tc>
-                <a:tc>
-                  <a:txBody>
-                    <a:bodyPr/>
-                    <a:lstStyle/>
-                    <a:p>
-                      <a:r>
-                        <a:rPr sz="2000" b="0">
-                          <a:solidFill>
-                            <a:srgbClr val="1F2A44"/>
-                          </a:solidFill>
-                          <a:latin typeface="Nunito Sans"/>
-                        </a:rPr>
-                        <a:t>Sí, no o un dato corto</a:t>
-                      </a:r>
-                    </a:p>
-                  </a:txBody>
-                  <a:tcPr>
-                    <a:solidFill>
-                      <a:srgbClr val="FFFFFF"/>
-                    </a:solidFill>
-                  </a:tcPr>
-                </a:tc>
-                <a:tc>
-                  <a:txBody>
-                    <a:bodyPr/>
-                    <a:lstStyle/>
-                    <a:p>
-                      <a:r>
-                        <a:rPr sz="2000" b="0">
-                          <a:solidFill>
-                            <a:srgbClr val="1F2A44"/>
-                          </a:solidFill>
-                          <a:latin typeface="Nunito Sans"/>
-                        </a:rPr>
-                        <a:t>«¿Has cenado?»</a:t>
-                      </a:r>
-                    </a:p>
-                  </a:txBody>
-                  <a:tcPr>
-                    <a:solidFill>
-                      <a:srgbClr val="FFFFFF"/>
-                    </a:solidFill>
-                  </a:tcPr>
-                </a:tc>
-              </a:tr>
-              <a:tr h="600000">
-                <a:tc>
-                  <a:txBody>
-                    <a:bodyPr/>
-                    <a:lstStyle/>
-                    <a:p>
-                      <a:r>
-                        <a:rPr sz="2000" b="1">
-                          <a:solidFill>
-                            <a:srgbClr val="1F2A44"/>
-                          </a:solidFill>
-                          <a:latin typeface="Nunito Sans"/>
-                        </a:rPr>
-                        <a:t>Abierta</a:t>
-                      </a:r>
-                    </a:p>
-                  </a:txBody>
-                  <a:tcPr>
-                    <a:solidFill>
-                      <a:srgbClr val="EAF0F7"/>
-                    </a:solidFill>
-                  </a:tcPr>
-                </a:tc>
-                <a:tc>
-                  <a:txBody>
-                    <a:bodyPr/>
-                    <a:lstStyle/>
-                    <a:p>
-                      <a:r>
-                        <a:rPr sz="2000" b="0">
-                          <a:solidFill>
-                            <a:srgbClr val="1F2A44"/>
-                          </a:solidFill>
-                          <a:latin typeface="Nunito Sans"/>
-                        </a:rPr>
-                        <a:t>Explicar, contar o dar razones</a:t>
-                      </a:r>
-                    </a:p>
-                  </a:txBody>
-                  <a:tcPr>
-                    <a:solidFill>
-                      <a:srgbClr val="EAF0F7"/>
-                    </a:solidFill>
-                  </a:tcPr>
-                </a:tc>
-                <a:tc>
-                  <a:txBody>
-                    <a:bodyPr/>
-                    <a:lstStyle/>
-                    <a:p>
-                      <a:r>
-                        <a:rPr sz="2000" b="0">
-                          <a:solidFill>
-                            <a:srgbClr val="1F2A44"/>
-                          </a:solidFill>
-                          <a:latin typeface="Nunito Sans"/>
-                        </a:rPr>
-                        <a:t>«¿Qué te pareció?»</a:t>
-                      </a:r>
-                    </a:p>
-                  </a:txBody>
-                  <a:tcPr>
-                    <a:solidFill>
-                      <a:srgbClr val="EAF0F7"/>
-                    </a:solidFill>
-                  </a:tcPr>
-                </a:tc>
-              </a:tr>
-              <a:tr h="600000">
-                <a:tc>
-                  <a:txBody>
-                    <a:bodyPr/>
-                    <a:lstStyle/>
-                    <a:p>
-                      <a:r>
-                        <a:rPr sz="2000" b="1">
-                          <a:solidFill>
-                            <a:srgbClr val="1F2A44"/>
-                          </a:solidFill>
-                          <a:latin typeface="Nunito Sans"/>
-                        </a:rPr>
-                        <a:t>«¿Cómo lo sabes?»</a:t>
-                      </a:r>
-                    </a:p>
-                  </a:txBody>
-                  <a:tcPr>
-                    <a:solidFill>
-                      <a:srgbClr val="FFFFFF"/>
-                    </a:solidFill>
-                  </a:tcPr>
-                </a:tc>
-                <a:tc>
-                  <a:txBody>
-                    <a:bodyPr/>
-                    <a:lstStyle/>
-                    <a:p>
-                      <a:r>
-                        <a:rPr sz="2000" b="0">
-                          <a:solidFill>
-                            <a:srgbClr val="1F2A44"/>
-                          </a:solidFill>
-                          <a:latin typeface="Nunito Sans"/>
-                        </a:rPr>
-                        <a:t>La fuente y las razones</a:t>
-                      </a:r>
-                    </a:p>
-                  </a:txBody>
-                  <a:tcPr>
-                    <a:solidFill>
-                      <a:srgbClr val="FFFFFF"/>
-                    </a:solidFill>
-                  </a:tcPr>
-                </a:tc>
-                <a:tc>
-                  <a:txBody>
-                    <a:bodyPr/>
-                    <a:lstStyle/>
-                    <a:p>
-                      <a:r>
-                        <a:rPr sz="2000" b="0">
-                          <a:solidFill>
-                            <a:srgbClr val="1F2A44"/>
-                          </a:solidFill>
-                          <a:latin typeface="Nunito Sans"/>
-                        </a:rPr>
-                        <a:t>«¿Dónde lo has leído?»</a:t>
-                      </a:r>
-                    </a:p>
-                  </a:txBody>
-                  <a:tcPr>
-                    <a:solidFill>
-                      <a:srgbClr val="FFFFFF"/>
-                    </a:solidFill>
-                  </a:tcPr>
-                </a:tc>
-              </a:tr>
-            </a:tbl>
-          </a:graphicData>
-        </a:graphic>
-      </p:graphicFrame>
+              <a:t>Casos resueltos</a:t>
+            </a:r>
+          </a:p>
+        </p:txBody>
+      </p:sp>
     </p:spTree>
   </p:cSld>
   <p:clrMapOvr>
